--- a/slides/slides_functions.pptx
+++ b/slides/slides_functions.pptx
@@ -11,16 +11,17 @@
     <p:sldId id="265" r:id="rId5"/>
     <p:sldId id="298" r:id="rId6"/>
     <p:sldId id="271" r:id="rId7"/>
-    <p:sldId id="299" r:id="rId8"/>
-    <p:sldId id="276" r:id="rId9"/>
-    <p:sldId id="277" r:id="rId10"/>
-    <p:sldId id="278" r:id="rId11"/>
-    <p:sldId id="279" r:id="rId12"/>
-    <p:sldId id="297" r:id="rId13"/>
-    <p:sldId id="258" r:id="rId14"/>
-    <p:sldId id="260" r:id="rId15"/>
-    <p:sldId id="262" r:id="rId16"/>
-    <p:sldId id="267" r:id="rId17"/>
+    <p:sldId id="300" r:id="rId8"/>
+    <p:sldId id="299" r:id="rId9"/>
+    <p:sldId id="301" r:id="rId10"/>
+    <p:sldId id="277" r:id="rId11"/>
+    <p:sldId id="278" r:id="rId12"/>
+    <p:sldId id="279" r:id="rId13"/>
+    <p:sldId id="297" r:id="rId14"/>
+    <p:sldId id="258" r:id="rId15"/>
+    <p:sldId id="260" r:id="rId16"/>
+    <p:sldId id="262" r:id="rId17"/>
+    <p:sldId id="267" r:id="rId18"/>
   </p:sldIdLst>
   <p:sldSz cx="9144000" cy="5143500" type="screen16x9"/>
   <p:notesSz cx="6858000" cy="9144000"/>
@@ -275,7 +276,7 @@
             <a:fld id="{11D00EF0-620D-6D42-BE8F-A31A5DBBF69B}" type="datetimeFigureOut">
               <a:rPr lang="en-US" smtClean="0"/>
               <a:pPr/>
-              <a:t>4/5/21</a:t>
+              <a:t>10/27/25</a:t>
             </a:fld>
             <a:endParaRPr lang="en-US"/>
           </a:p>
@@ -457,7 +458,7 @@
           <a:p>
             <a:fld id="{11D00EF0-620D-6D42-BE8F-A31A5DBBF69B}" type="datetimeFigureOut">
               <a:rPr lang="en-US" smtClean="0"/>
-              <a:t>4/5/21</a:t>
+              <a:t>10/27/25</a:t>
             </a:fld>
             <a:endParaRPr lang="en-US"/>
           </a:p>
@@ -632,7 +633,7 @@
           <a:p>
             <a:fld id="{11D00EF0-620D-6D42-BE8F-A31A5DBBF69B}" type="datetimeFigureOut">
               <a:rPr lang="en-US" smtClean="0"/>
-              <a:t>4/5/21</a:t>
+              <a:t>10/27/25</a:t>
             </a:fld>
             <a:endParaRPr lang="en-US"/>
           </a:p>
@@ -836,7 +837,7 @@
             <a:fld id="{11D00EF0-620D-6D42-BE8F-A31A5DBBF69B}" type="datetimeFigureOut">
               <a:rPr lang="en-US" smtClean="0"/>
               <a:pPr/>
-              <a:t>4/5/21</a:t>
+              <a:t>10/27/25</a:t>
             </a:fld>
             <a:endParaRPr lang="en-US"/>
           </a:p>
@@ -1088,7 +1089,7 @@
           <a:p>
             <a:fld id="{11D00EF0-620D-6D42-BE8F-A31A5DBBF69B}" type="datetimeFigureOut">
               <a:rPr lang="en-US" smtClean="0"/>
-              <a:t>4/5/21</a:t>
+              <a:t>10/27/25</a:t>
             </a:fld>
             <a:endParaRPr lang="en-US"/>
           </a:p>
@@ -1315,7 +1316,7 @@
           <a:p>
             <a:fld id="{11D00EF0-620D-6D42-BE8F-A31A5DBBF69B}" type="datetimeFigureOut">
               <a:rPr lang="en-US" smtClean="0"/>
-              <a:t>4/5/21</a:t>
+              <a:t>10/27/25</a:t>
             </a:fld>
             <a:endParaRPr lang="en-US"/>
           </a:p>
@@ -1677,7 +1678,7 @@
           <a:p>
             <a:fld id="{11D00EF0-620D-6D42-BE8F-A31A5DBBF69B}" type="datetimeFigureOut">
               <a:rPr lang="en-US" smtClean="0"/>
-              <a:t>4/5/21</a:t>
+              <a:t>10/27/25</a:t>
             </a:fld>
             <a:endParaRPr lang="en-US"/>
           </a:p>
@@ -1790,7 +1791,7 @@
           <a:p>
             <a:fld id="{11D00EF0-620D-6D42-BE8F-A31A5DBBF69B}" type="datetimeFigureOut">
               <a:rPr lang="en-US" smtClean="0"/>
-              <a:t>4/5/21</a:t>
+              <a:t>10/27/25</a:t>
             </a:fld>
             <a:endParaRPr lang="en-US"/>
           </a:p>
@@ -1880,7 +1881,7 @@
           <a:p>
             <a:fld id="{11D00EF0-620D-6D42-BE8F-A31A5DBBF69B}" type="datetimeFigureOut">
               <a:rPr lang="en-US" smtClean="0"/>
-              <a:t>4/5/21</a:t>
+              <a:t>10/27/25</a:t>
             </a:fld>
             <a:endParaRPr lang="en-US"/>
           </a:p>
@@ -2152,7 +2153,7 @@
           <a:p>
             <a:fld id="{11D00EF0-620D-6D42-BE8F-A31A5DBBF69B}" type="datetimeFigureOut">
               <a:rPr lang="en-US" smtClean="0"/>
-              <a:t>4/5/21</a:t>
+              <a:t>10/27/25</a:t>
             </a:fld>
             <a:endParaRPr lang="en-US"/>
           </a:p>
@@ -2404,7 +2405,7 @@
           <a:p>
             <a:fld id="{11D00EF0-620D-6D42-BE8F-A31A5DBBF69B}" type="datetimeFigureOut">
               <a:rPr lang="en-US" smtClean="0"/>
-              <a:t>4/5/21</a:t>
+              <a:t>10/27/25</a:t>
             </a:fld>
             <a:endParaRPr lang="en-US"/>
           </a:p>
@@ -2612,7 +2613,7 @@
           <a:p>
             <a:fld id="{11D00EF0-620D-6D42-BE8F-A31A5DBBF69B}" type="datetimeFigureOut">
               <a:rPr lang="en-US" smtClean="0"/>
-              <a:t>4/5/21</a:t>
+              <a:t>10/27/25</a:t>
             </a:fld>
             <a:endParaRPr lang="en-US"/>
           </a:p>
@@ -3045,31 +3046,6 @@
           </a:p>
         </p:txBody>
       </p:sp>
-      <p:sp>
-        <p:nvSpPr>
-          <p:cNvPr id="3" name="Subtitle 2">
-            <a:extLst>
-              <a:ext uri="{FF2B5EF4-FFF2-40B4-BE49-F238E27FC236}">
-                <a16:creationId xmlns:a16="http://schemas.microsoft.com/office/drawing/2014/main" id="{EA9887D6-51B1-7F4B-8F7F-138B0CB65E74}"/>
-              </a:ext>
-            </a:extLst>
-          </p:cNvPr>
-          <p:cNvSpPr>
-            <a:spLocks noGrp="1"/>
-          </p:cNvSpPr>
-          <p:nvPr>
-            <p:ph type="subTitle" idx="1"/>
-          </p:nvPr>
-        </p:nvSpPr>
-        <p:spPr/>
-        <p:txBody>
-          <a:bodyPr/>
-          <a:lstStyle/>
-          <a:p>
-            <a:endParaRPr lang="en-US"/>
-          </a:p>
-        </p:txBody>
-      </p:sp>
     </p:spTree>
     <p:extLst>
       <p:ext uri="{BB962C8B-B14F-4D97-AF65-F5344CB8AC3E}">
@@ -3084,6 +3060,88 @@
 </file>
 
 <file path=ppt/slides/slide10.xml><?xml version="1.0" encoding="utf-8"?>
+<p:sld xmlns:a="http://schemas.openxmlformats.org/drawingml/2006/main" xmlns:r="http://schemas.openxmlformats.org/officeDocument/2006/relationships" xmlns:p="http://schemas.openxmlformats.org/presentationml/2006/main">
+  <p:cSld>
+    <p:spTree>
+      <p:nvGrpSpPr>
+        <p:cNvPr id="1" name=""/>
+        <p:cNvGrpSpPr/>
+        <p:nvPr/>
+      </p:nvGrpSpPr>
+      <p:grpSpPr>
+        <a:xfrm>
+          <a:off x="0" y="0"/>
+          <a:ext cx="0" cy="0"/>
+          <a:chOff x="0" y="0"/>
+          <a:chExt cx="0" cy="0"/>
+        </a:xfrm>
+      </p:grpSpPr>
+      <p:sp>
+        <p:nvSpPr>
+          <p:cNvPr id="2" name="Title 1"/>
+          <p:cNvSpPr>
+            <a:spLocks noGrp="1"/>
+          </p:cNvSpPr>
+          <p:nvPr>
+            <p:ph type="title"/>
+          </p:nvPr>
+        </p:nvSpPr>
+        <p:spPr/>
+        <p:txBody>
+          <a:bodyPr/>
+          <a:lstStyle/>
+          <a:p>
+            <a:r>
+              <a:rPr lang="en-US" dirty="0"/>
+              <a:t>Example names</a:t>
+            </a:r>
+          </a:p>
+        </p:txBody>
+      </p:sp>
+      <p:pic>
+        <p:nvPicPr>
+          <p:cNvPr id="4" name="Picture 3"/>
+          <p:cNvPicPr>
+            <a:picLocks noChangeAspect="1"/>
+          </p:cNvPicPr>
+          <p:nvPr/>
+        </p:nvPicPr>
+        <p:blipFill>
+          <a:blip r:embed="rId2">
+            <a:extLst>
+              <a:ext uri="{28A0092B-C50C-407E-A947-70E740481C1C}">
+                <a14:useLocalDpi xmlns:a14="http://schemas.microsoft.com/office/drawing/2010/main" val="0"/>
+              </a:ext>
+            </a:extLst>
+          </a:blip>
+          <a:stretch>
+            <a:fillRect/>
+          </a:stretch>
+        </p:blipFill>
+        <p:spPr>
+          <a:xfrm>
+            <a:off x="628650" y="1588304"/>
+            <a:ext cx="7187609" cy="2523608"/>
+          </a:xfrm>
+          <a:prstGeom prst="rect">
+            <a:avLst/>
+          </a:prstGeom>
+        </p:spPr>
+      </p:pic>
+    </p:spTree>
+    <p:extLst>
+      <p:ext uri="{BB962C8B-B14F-4D97-AF65-F5344CB8AC3E}">
+        <p14:creationId xmlns:p14="http://schemas.microsoft.com/office/powerpoint/2010/main" val="1907897959"/>
+      </p:ext>
+    </p:extLst>
+  </p:cSld>
+  <p:clrMapOvr>
+    <a:masterClrMapping/>
+  </p:clrMapOvr>
+</p:sld>
+</file>
+
+<file path=ppt/slides/slide11.xml><?xml version="1.0" encoding="utf-8"?>
 <p:sld xmlns:a="http://schemas.openxmlformats.org/drawingml/2006/main" xmlns:r="http://schemas.openxmlformats.org/officeDocument/2006/relationships" xmlns:p="http://schemas.openxmlformats.org/presentationml/2006/main">
   <p:cSld>
     <p:spTree>
@@ -3167,96 +3225,6 @@
 </p:sld>
 </file>
 
-<file path=ppt/slides/slide11.xml><?xml version="1.0" encoding="utf-8"?>
-<p:sld xmlns:a="http://schemas.openxmlformats.org/drawingml/2006/main" xmlns:r="http://schemas.openxmlformats.org/officeDocument/2006/relationships" xmlns:p="http://schemas.openxmlformats.org/presentationml/2006/main">
-  <p:cSld>
-    <p:spTree>
-      <p:nvGrpSpPr>
-        <p:cNvPr id="1" name=""/>
-        <p:cNvGrpSpPr/>
-        <p:nvPr/>
-      </p:nvGrpSpPr>
-      <p:grpSpPr>
-        <a:xfrm>
-          <a:off x="0" y="0"/>
-          <a:ext cx="0" cy="0"/>
-          <a:chOff x="0" y="0"/>
-          <a:chExt cx="0" cy="0"/>
-        </a:xfrm>
-      </p:grpSpPr>
-      <p:sp>
-        <p:nvSpPr>
-          <p:cNvPr id="2" name="Title 1"/>
-          <p:cNvSpPr>
-            <a:spLocks noGrp="1"/>
-          </p:cNvSpPr>
-          <p:nvPr>
-            <p:ph type="title"/>
-          </p:nvPr>
-        </p:nvSpPr>
-        <p:spPr/>
-        <p:txBody>
-          <a:bodyPr>
-            <a:normAutofit fontScale="90000"/>
-          </a:bodyPr>
-          <a:lstStyle/>
-          <a:p>
-            <a:r>
-              <a:rPr lang="en-US" dirty="0"/>
-              <a:t>Use commenting to explain your code and separate sections</a:t>
-            </a:r>
-          </a:p>
-        </p:txBody>
-      </p:sp>
-      <p:sp>
-        <p:nvSpPr>
-          <p:cNvPr id="3" name="Content Placeholder 2"/>
-          <p:cNvSpPr>
-            <a:spLocks noGrp="1"/>
-          </p:cNvSpPr>
-          <p:nvPr>
-            <p:ph idx="1"/>
-          </p:nvPr>
-        </p:nvSpPr>
-        <p:spPr>
-          <a:xfrm>
-            <a:off x="628650" y="1709461"/>
-            <a:ext cx="7886700" cy="3263504"/>
-          </a:xfrm>
-        </p:spPr>
-        <p:txBody>
-          <a:bodyPr/>
-          <a:lstStyle/>
-          <a:p>
-            <a:r>
-              <a:rPr lang="en-US" dirty="0"/>
-              <a:t># Explain “why”</a:t>
-            </a:r>
-          </a:p>
-          <a:p>
-            <a:endParaRPr lang="en-US" dirty="0"/>
-          </a:p>
-          <a:p>
-            <a:r>
-              <a:rPr lang="en-US" dirty="0"/>
-              <a:t>Generally the ”what” and “how” should be clear from the code. If not, consider adding intermediate variables with useful names</a:t>
-            </a:r>
-          </a:p>
-        </p:txBody>
-      </p:sp>
-    </p:spTree>
-    <p:extLst>
-      <p:ext uri="{BB962C8B-B14F-4D97-AF65-F5344CB8AC3E}">
-        <p14:creationId xmlns:p14="http://schemas.microsoft.com/office/powerpoint/2010/main" val="979919963"/>
-      </p:ext>
-    </p:extLst>
-  </p:cSld>
-  <p:clrMapOvr>
-    <a:masterClrMapping/>
-  </p:clrMapOvr>
-</p:sld>
-</file>
-
 <file path=ppt/slides/slide12.xml><?xml version="1.0" encoding="utf-8"?>
 <p:sld xmlns:a="http://schemas.openxmlformats.org/drawingml/2006/main" xmlns:r="http://schemas.openxmlformats.org/officeDocument/2006/relationships" xmlns:p="http://schemas.openxmlformats.org/presentationml/2006/main">
   <p:cSld>
@@ -3276,6 +3244,96 @@
       </p:grpSpPr>
       <p:sp>
         <p:nvSpPr>
+          <p:cNvPr id="2" name="Title 1"/>
+          <p:cNvSpPr>
+            <a:spLocks noGrp="1"/>
+          </p:cNvSpPr>
+          <p:nvPr>
+            <p:ph type="title"/>
+          </p:nvPr>
+        </p:nvSpPr>
+        <p:spPr/>
+        <p:txBody>
+          <a:bodyPr>
+            <a:normAutofit fontScale="90000"/>
+          </a:bodyPr>
+          <a:lstStyle/>
+          <a:p>
+            <a:r>
+              <a:rPr lang="en-US" dirty="0"/>
+              <a:t>Use commenting to explain your code and separate sections</a:t>
+            </a:r>
+          </a:p>
+        </p:txBody>
+      </p:sp>
+      <p:sp>
+        <p:nvSpPr>
+          <p:cNvPr id="3" name="Content Placeholder 2"/>
+          <p:cNvSpPr>
+            <a:spLocks noGrp="1"/>
+          </p:cNvSpPr>
+          <p:nvPr>
+            <p:ph idx="1"/>
+          </p:nvPr>
+        </p:nvSpPr>
+        <p:spPr>
+          <a:xfrm>
+            <a:off x="628650" y="1709461"/>
+            <a:ext cx="7886700" cy="3263504"/>
+          </a:xfrm>
+        </p:spPr>
+        <p:txBody>
+          <a:bodyPr/>
+          <a:lstStyle/>
+          <a:p>
+            <a:r>
+              <a:rPr lang="en-US" dirty="0"/>
+              <a:t># Explain “why”</a:t>
+            </a:r>
+          </a:p>
+          <a:p>
+            <a:endParaRPr lang="en-US" dirty="0"/>
+          </a:p>
+          <a:p>
+            <a:r>
+              <a:rPr lang="en-US" dirty="0"/>
+              <a:t>Generally the ”what” and “how” should be clear from the code. If not, consider adding intermediate variables with useful names</a:t>
+            </a:r>
+          </a:p>
+        </p:txBody>
+      </p:sp>
+    </p:spTree>
+    <p:extLst>
+      <p:ext uri="{BB962C8B-B14F-4D97-AF65-F5344CB8AC3E}">
+        <p14:creationId xmlns:p14="http://schemas.microsoft.com/office/powerpoint/2010/main" val="979919963"/>
+      </p:ext>
+    </p:extLst>
+  </p:cSld>
+  <p:clrMapOvr>
+    <a:masterClrMapping/>
+  </p:clrMapOvr>
+</p:sld>
+</file>
+
+<file path=ppt/slides/slide13.xml><?xml version="1.0" encoding="utf-8"?>
+<p:sld xmlns:a="http://schemas.openxmlformats.org/drawingml/2006/main" xmlns:r="http://schemas.openxmlformats.org/officeDocument/2006/relationships" xmlns:p="http://schemas.openxmlformats.org/presentationml/2006/main">
+  <p:cSld>
+    <p:spTree>
+      <p:nvGrpSpPr>
+        <p:cNvPr id="1" name=""/>
+        <p:cNvGrpSpPr/>
+        <p:nvPr/>
+      </p:nvGrpSpPr>
+      <p:grpSpPr>
+        <a:xfrm>
+          <a:off x="0" y="0"/>
+          <a:ext cx="0" cy="0"/>
+          <a:chOff x="0" y="0"/>
+          <a:chExt cx="0" cy="0"/>
+        </a:xfrm>
+      </p:grpSpPr>
+      <p:sp>
+        <p:nvSpPr>
           <p:cNvPr id="2" name="Title 1">
             <a:extLst>
               <a:ext uri="{FF2B5EF4-FFF2-40B4-BE49-F238E27FC236}">
@@ -3355,7 +3413,7 @@
 </p:sld>
 </file>
 
-<file path=ppt/slides/slide13.xml><?xml version="1.0" encoding="utf-8"?>
+<file path=ppt/slides/slide14.xml><?xml version="1.0" encoding="utf-8"?>
 <p:sld xmlns:a="http://schemas.openxmlformats.org/drawingml/2006/main" xmlns:r="http://schemas.openxmlformats.org/officeDocument/2006/relationships" xmlns:p="http://schemas.openxmlformats.org/presentationml/2006/main">
   <p:cSld>
     <p:spTree>
@@ -3497,7 +3555,7 @@
 </p:sld>
 </file>
 
-<file path=ppt/slides/slide14.xml><?xml version="1.0" encoding="utf-8"?>
+<file path=ppt/slides/slide15.xml><?xml version="1.0" encoding="utf-8"?>
 <p:sld xmlns:a="http://schemas.openxmlformats.org/drawingml/2006/main" xmlns:r="http://schemas.openxmlformats.org/officeDocument/2006/relationships" xmlns:p="http://schemas.openxmlformats.org/presentationml/2006/main">
   <p:cSld>
     <p:spTree>
@@ -3612,7 +3670,7 @@
 </p:sld>
 </file>
 
-<file path=ppt/slides/slide15.xml><?xml version="1.0" encoding="utf-8"?>
+<file path=ppt/slides/slide16.xml><?xml version="1.0" encoding="utf-8"?>
 <p:sld xmlns:a="http://schemas.openxmlformats.org/drawingml/2006/main" xmlns:r="http://schemas.openxmlformats.org/officeDocument/2006/relationships" xmlns:p="http://schemas.openxmlformats.org/presentationml/2006/main">
   <p:cSld>
     <p:spTree>
@@ -3697,7 +3755,7 @@
 </p:sld>
 </file>
 
-<file path=ppt/slides/slide16.xml><?xml version="1.0" encoding="utf-8"?>
+<file path=ppt/slides/slide17.xml><?xml version="1.0" encoding="utf-8"?>
 <p:sld xmlns:a="http://schemas.openxmlformats.org/drawingml/2006/main" xmlns:r="http://schemas.openxmlformats.org/officeDocument/2006/relationships" xmlns:p="http://schemas.openxmlformats.org/presentationml/2006/main">
   <p:cSld>
     <p:spTree>
@@ -4574,7 +4632,7 @@
         </p:nvSpPr>
         <p:spPr>
           <a:xfrm>
-            <a:off x="628651" y="1087263"/>
+            <a:off x="628651" y="1254240"/>
             <a:ext cx="7675378" cy="2926334"/>
           </a:xfrm>
         </p:spPr>
@@ -4854,7 +4912,13 @@
   <p:cSld>
     <p:spTree>
       <p:nvGrpSpPr>
-        <p:cNvPr id="1" name=""/>
+        <p:cNvPr id="1" name="">
+          <a:extLst>
+            <a:ext uri="{FF2B5EF4-FFF2-40B4-BE49-F238E27FC236}">
+              <a16:creationId xmlns:a16="http://schemas.microsoft.com/office/drawing/2014/main" id="{36A51B7E-587D-83F8-DBE4-54AC3C1AEAC4}"/>
+            </a:ext>
+          </a:extLst>
+        </p:cNvPr>
         <p:cNvGrpSpPr/>
         <p:nvPr/>
       </p:nvGrpSpPr>
@@ -4868,7 +4932,13 @@
       </p:grpSpPr>
       <p:sp>
         <p:nvSpPr>
-          <p:cNvPr id="2" name="Title 1"/>
+          <p:cNvPr id="2" name="Title 1">
+            <a:extLst>
+              <a:ext uri="{FF2B5EF4-FFF2-40B4-BE49-F238E27FC236}">
+                <a16:creationId xmlns:a16="http://schemas.microsoft.com/office/drawing/2014/main" id="{A9E9BFF3-63FB-55B7-A481-F93085232D70}"/>
+              </a:ext>
+            </a:extLst>
+          </p:cNvPr>
           <p:cNvSpPr>
             <a:spLocks noGrp="1"/>
           </p:cNvSpPr>
@@ -4895,7 +4965,13 @@
       </p:sp>
       <p:sp>
         <p:nvSpPr>
-          <p:cNvPr id="3" name="Content Placeholder 2"/>
+          <p:cNvPr id="3" name="Content Placeholder 2">
+            <a:extLst>
+              <a:ext uri="{FF2B5EF4-FFF2-40B4-BE49-F238E27FC236}">
+                <a16:creationId xmlns:a16="http://schemas.microsoft.com/office/drawing/2014/main" id="{69F14FD4-38F7-62A2-5D8F-281AF2B6CB21}"/>
+              </a:ext>
+            </a:extLst>
+          </p:cNvPr>
           <p:cNvSpPr>
             <a:spLocks noGrp="1"/>
           </p:cNvSpPr>
@@ -4905,7 +4981,7 @@
         </p:nvSpPr>
         <p:spPr>
           <a:xfrm>
-            <a:off x="628651" y="1087263"/>
+            <a:off x="628651" y="1254240"/>
             <a:ext cx="7675378" cy="2926334"/>
           </a:xfrm>
         </p:spPr>
@@ -4987,49 +5063,10 @@
           </a:p>
         </p:txBody>
       </p:sp>
-      <p:sp>
-        <p:nvSpPr>
-          <p:cNvPr id="4" name="TextBox 3">
-            <a:extLst>
-              <a:ext uri="{FF2B5EF4-FFF2-40B4-BE49-F238E27FC236}">
-                <a16:creationId xmlns:a16="http://schemas.microsoft.com/office/drawing/2014/main" id="{49ABF985-1E64-8744-8800-6B88F97DE310}"/>
-              </a:ext>
-            </a:extLst>
-          </p:cNvPr>
-          <p:cNvSpPr txBox="1"/>
-          <p:nvPr/>
-        </p:nvSpPr>
-        <p:spPr>
-          <a:xfrm>
-            <a:off x="628651" y="4226634"/>
-            <a:ext cx="7600950" cy="646331"/>
-          </a:xfrm>
-          <a:prstGeom prst="rect">
-            <a:avLst/>
-          </a:prstGeom>
-          <a:noFill/>
-        </p:spPr>
-        <p:txBody>
-          <a:bodyPr wrap="square" rtlCol="0">
-            <a:spAutoFit/>
-          </a:bodyPr>
-          <a:lstStyle/>
-          <a:p>
-            <a:r>
-              <a:rPr lang="en-US" dirty="0">
-                <a:latin typeface="Avenir Book" charset="0"/>
-                <a:ea typeface="Avenir Book" charset="0"/>
-                <a:cs typeface="Avenir Book" charset="0"/>
-              </a:rPr>
-              <a:t>Then it’s a good idea to do some testing with different inputs to make sure the function works as expected</a:t>
-            </a:r>
-          </a:p>
-        </p:txBody>
-      </p:sp>
     </p:spTree>
     <p:extLst>
       <p:ext uri="{BB962C8B-B14F-4D97-AF65-F5344CB8AC3E}">
-        <p14:creationId xmlns:p14="http://schemas.microsoft.com/office/powerpoint/2010/main" val="2791250555"/>
+        <p14:creationId xmlns:p14="http://schemas.microsoft.com/office/powerpoint/2010/main" val="4014810336"/>
       </p:ext>
     </p:extLst>
   </p:cSld>
@@ -5246,14 +5283,19 @@
             <p:ph type="title"/>
           </p:nvPr>
         </p:nvSpPr>
-        <p:spPr/>
+        <p:spPr>
+          <a:xfrm>
+            <a:off x="628651" y="93091"/>
+            <a:ext cx="7886700" cy="994172"/>
+          </a:xfrm>
+        </p:spPr>
         <p:txBody>
           <a:bodyPr/>
           <a:lstStyle/>
           <a:p>
             <a:r>
               <a:rPr lang="en-US" dirty="0"/>
-              <a:t>Naming your functions</a:t>
+              <a:t>Three key steps to creating a function</a:t>
             </a:r>
           </a:p>
         </p:txBody>
@@ -5268,95 +5310,319 @@
             <p:ph idx="1"/>
           </p:nvPr>
         </p:nvSpPr>
-        <p:spPr/>
+        <p:spPr>
+          <a:xfrm>
+            <a:off x="628651" y="1087263"/>
+            <a:ext cx="7675378" cy="2926334"/>
+          </a:xfrm>
+        </p:spPr>
         <p:txBody>
           <a:bodyPr>
-            <a:normAutofit lnSpcReduction="10000"/>
+            <a:normAutofit/>
           </a:bodyPr>
           <a:lstStyle/>
           <a:p>
-            <a:pPr>
-              <a:spcAft>
-                <a:spcPts val="1200"/>
-              </a:spcAft>
+            <a:pPr marL="457200" indent="-457200">
+              <a:buFont typeface="+mj-lt"/>
+              <a:buAutoNum type="arabicPeriod"/>
             </a:pPr>
             <a:r>
               <a:rPr lang="en-US" dirty="0"/>
-              <a:t>Short, but clearly evoke what the function does</a:t>
-            </a:r>
-          </a:p>
-          <a:p>
-            <a:pPr lvl="1">
-              <a:spcAft>
-                <a:spcPts val="1200"/>
-              </a:spcAft>
-            </a:pPr>
+              <a:t>You need to pick a </a:t>
+            </a:r>
+            <a:r>
+              <a:rPr lang="en-US" b="1" dirty="0"/>
+              <a:t>name</a:t>
+            </a:r>
             <a:r>
               <a:rPr lang="en-US" dirty="0"/>
-              <a:t>Better to be clear than short</a:t>
-            </a:r>
-          </a:p>
-          <a:p>
-            <a:pPr>
-              <a:spcAft>
-                <a:spcPts val="1200"/>
-              </a:spcAft>
-            </a:pPr>
-            <a:r>
-              <a:rPr lang="en-US" dirty="0"/>
-              <a:t>Generally, function names should be verbs, and arguments should be nouns.</a:t>
-            </a:r>
-          </a:p>
-          <a:p>
-            <a:pPr>
-              <a:spcAft>
-                <a:spcPts val="1200"/>
-              </a:spcAft>
-            </a:pPr>
-            <a:r>
-              <a:rPr lang="en-US" dirty="0"/>
-              <a:t>Nouns are ok if the function computes a very well known noun (i.e. mean() is better than </a:t>
-            </a:r>
-            <a:r>
-              <a:rPr lang="en-US" dirty="0" err="1"/>
-              <a:t>compute_mean</a:t>
-            </a:r>
-            <a:r>
-              <a:rPr lang="en-US" dirty="0"/>
-              <a:t>())</a:t>
-            </a:r>
-          </a:p>
-          <a:p>
-            <a:pPr>
-              <a:spcAft>
-                <a:spcPts val="1200"/>
-              </a:spcAft>
-            </a:pPr>
-            <a:r>
-              <a:rPr lang="en-US" dirty="0"/>
-              <a:t>A noun might be a better choice is if you’re using a very broad verb like “get”, “compute”, “calculate”, or “determine”</a:t>
-            </a:r>
-          </a:p>
-          <a:p>
-            <a:pPr>
-              <a:spcAft>
-                <a:spcPts val="1200"/>
-              </a:spcAft>
+              <a:t> for the function. Pick something that helps you understand what the function does</a:t>
+            </a:r>
+          </a:p>
+          <a:p>
+            <a:pPr marL="457200" indent="-457200">
+              <a:buFont typeface="+mj-lt"/>
+              <a:buAutoNum type="arabicPeriod"/>
             </a:pPr>
             <a:endParaRPr lang="en-US" dirty="0"/>
+          </a:p>
+          <a:p>
+            <a:pPr marL="457200" indent="-457200">
+              <a:buFont typeface="+mj-lt"/>
+              <a:buAutoNum type="arabicPeriod"/>
+            </a:pPr>
+            <a:r>
+              <a:rPr lang="en-US" dirty="0"/>
+              <a:t>You list the inputs, or </a:t>
+            </a:r>
+            <a:r>
+              <a:rPr lang="en-US" b="1" dirty="0"/>
+              <a:t>arguments</a:t>
+            </a:r>
+            <a:r>
+              <a:rPr lang="en-US" dirty="0"/>
+              <a:t>, to the function inside function</a:t>
+            </a:r>
+          </a:p>
+          <a:p>
+            <a:pPr marL="457200" indent="-457200">
+              <a:buFont typeface="+mj-lt"/>
+              <a:buAutoNum type="arabicPeriod"/>
+            </a:pPr>
+            <a:endParaRPr lang="en-US" dirty="0"/>
+          </a:p>
+          <a:p>
+            <a:pPr marL="457200" indent="-457200">
+              <a:buFont typeface="+mj-lt"/>
+              <a:buAutoNum type="arabicPeriod"/>
+            </a:pPr>
+            <a:r>
+              <a:rPr lang="en-US" dirty="0"/>
+              <a:t>You place the code you have developed in </a:t>
+            </a:r>
+            <a:r>
+              <a:rPr lang="en-US" b="1" dirty="0"/>
+              <a:t>body</a:t>
+            </a:r>
+            <a:r>
+              <a:rPr lang="en-US" dirty="0"/>
+              <a:t> of the function, a { } block that immediately follows function(...).</a:t>
+            </a:r>
+          </a:p>
+          <a:p>
+            <a:endParaRPr lang="en-US" dirty="0"/>
+          </a:p>
+        </p:txBody>
+      </p:sp>
+      <p:sp>
+        <p:nvSpPr>
+          <p:cNvPr id="5" name="TextBox 4">
+            <a:extLst>
+              <a:ext uri="{FF2B5EF4-FFF2-40B4-BE49-F238E27FC236}">
+                <a16:creationId xmlns:a16="http://schemas.microsoft.com/office/drawing/2014/main" id="{FE1212A5-3AC7-A54E-8D05-BD4218080F67}"/>
+              </a:ext>
+            </a:extLst>
+          </p:cNvPr>
+          <p:cNvSpPr txBox="1"/>
+          <p:nvPr/>
+        </p:nvSpPr>
+        <p:spPr>
+          <a:xfrm>
+            <a:off x="628651" y="4226634"/>
+            <a:ext cx="7600950" cy="646331"/>
+          </a:xfrm>
+          <a:prstGeom prst="rect">
+            <a:avLst/>
+          </a:prstGeom>
+          <a:noFill/>
+        </p:spPr>
+        <p:txBody>
+          <a:bodyPr wrap="square" rtlCol="0">
+            <a:spAutoFit/>
+          </a:bodyPr>
+          <a:lstStyle/>
+          <a:p>
+            <a:r>
+              <a:rPr lang="en-US" dirty="0">
+                <a:latin typeface="Avenir Book" charset="0"/>
+                <a:ea typeface="Avenir Book" charset="0"/>
+                <a:cs typeface="Avenir Book" charset="0"/>
+              </a:rPr>
+              <a:t>Then it’s a good idea to do some testing with different inputs to make sure the function works as expected</a:t>
+            </a:r>
           </a:p>
         </p:txBody>
       </p:sp>
     </p:spTree>
     <p:extLst>
       <p:ext uri="{BB962C8B-B14F-4D97-AF65-F5344CB8AC3E}">
-        <p14:creationId xmlns:p14="http://schemas.microsoft.com/office/powerpoint/2010/main" val="1152337593"/>
+        <p14:creationId xmlns:p14="http://schemas.microsoft.com/office/powerpoint/2010/main" val="2791250555"/>
       </p:ext>
     </p:extLst>
   </p:cSld>
   <p:clrMapOvr>
     <a:masterClrMapping/>
   </p:clrMapOvr>
+  <p:timing>
+    <p:tnLst>
+      <p:par>
+        <p:cTn id="1" dur="indefinite" restart="never" nodeType="tmRoot">
+          <p:childTnLst>
+            <p:seq concurrent="1" nextAc="seek">
+              <p:cTn id="2" dur="indefinite" nodeType="mainSeq">
+                <p:childTnLst>
+                  <p:par>
+                    <p:cTn id="3" fill="hold">
+                      <p:stCondLst>
+                        <p:cond delay="indefinite"/>
+                      </p:stCondLst>
+                      <p:childTnLst>
+                        <p:par>
+                          <p:cTn id="4" fill="hold">
+                            <p:stCondLst>
+                              <p:cond delay="0"/>
+                            </p:stCondLst>
+                            <p:childTnLst>
+                              <p:par>
+                                <p:cTn id="5" presetID="1" presetClass="entr" presetSubtype="0" fill="hold" grpId="0" nodeType="clickEffect">
+                                  <p:stCondLst>
+                                    <p:cond delay="0"/>
+                                  </p:stCondLst>
+                                  <p:childTnLst>
+                                    <p:set>
+                                      <p:cBhvr>
+                                        <p:cTn id="6" dur="1" fill="hold">
+                                          <p:stCondLst>
+                                            <p:cond delay="0"/>
+                                          </p:stCondLst>
+                                        </p:cTn>
+                                        <p:tgtEl>
+                                          <p:spTgt spid="3">
+                                            <p:txEl>
+                                              <p:pRg st="0" end="0"/>
+                                            </p:txEl>
+                                          </p:spTgt>
+                                        </p:tgtEl>
+                                        <p:attrNameLst>
+                                          <p:attrName>style.visibility</p:attrName>
+                                        </p:attrNameLst>
+                                      </p:cBhvr>
+                                      <p:to>
+                                        <p:strVal val="visible"/>
+                                      </p:to>
+                                    </p:set>
+                                  </p:childTnLst>
+                                </p:cTn>
+                              </p:par>
+                            </p:childTnLst>
+                          </p:cTn>
+                        </p:par>
+                      </p:childTnLst>
+                    </p:cTn>
+                  </p:par>
+                  <p:par>
+                    <p:cTn id="7" fill="hold">
+                      <p:stCondLst>
+                        <p:cond delay="indefinite"/>
+                      </p:stCondLst>
+                      <p:childTnLst>
+                        <p:par>
+                          <p:cTn id="8" fill="hold">
+                            <p:stCondLst>
+                              <p:cond delay="0"/>
+                            </p:stCondLst>
+                            <p:childTnLst>
+                              <p:par>
+                                <p:cTn id="9" presetID="1" presetClass="entr" presetSubtype="0" fill="hold" grpId="0" nodeType="clickEffect">
+                                  <p:stCondLst>
+                                    <p:cond delay="0"/>
+                                  </p:stCondLst>
+                                  <p:childTnLst>
+                                    <p:set>
+                                      <p:cBhvr>
+                                        <p:cTn id="10" dur="1" fill="hold">
+                                          <p:stCondLst>
+                                            <p:cond delay="0"/>
+                                          </p:stCondLst>
+                                        </p:cTn>
+                                        <p:tgtEl>
+                                          <p:spTgt spid="3">
+                                            <p:txEl>
+                                              <p:pRg st="2" end="2"/>
+                                            </p:txEl>
+                                          </p:spTgt>
+                                        </p:tgtEl>
+                                        <p:attrNameLst>
+                                          <p:attrName>style.visibility</p:attrName>
+                                        </p:attrNameLst>
+                                      </p:cBhvr>
+                                      <p:to>
+                                        <p:strVal val="visible"/>
+                                      </p:to>
+                                    </p:set>
+                                  </p:childTnLst>
+                                </p:cTn>
+                              </p:par>
+                            </p:childTnLst>
+                          </p:cTn>
+                        </p:par>
+                      </p:childTnLst>
+                    </p:cTn>
+                  </p:par>
+                  <p:par>
+                    <p:cTn id="11" fill="hold">
+                      <p:stCondLst>
+                        <p:cond delay="indefinite"/>
+                      </p:stCondLst>
+                      <p:childTnLst>
+                        <p:par>
+                          <p:cTn id="12" fill="hold">
+                            <p:stCondLst>
+                              <p:cond delay="0"/>
+                            </p:stCondLst>
+                            <p:childTnLst>
+                              <p:par>
+                                <p:cTn id="13" presetID="1" presetClass="entr" presetSubtype="0" fill="hold" grpId="0" nodeType="clickEffect">
+                                  <p:stCondLst>
+                                    <p:cond delay="0"/>
+                                  </p:stCondLst>
+                                  <p:childTnLst>
+                                    <p:set>
+                                      <p:cBhvr>
+                                        <p:cTn id="14" dur="1" fill="hold">
+                                          <p:stCondLst>
+                                            <p:cond delay="0"/>
+                                          </p:stCondLst>
+                                        </p:cTn>
+                                        <p:tgtEl>
+                                          <p:spTgt spid="3">
+                                            <p:txEl>
+                                              <p:pRg st="4" end="4"/>
+                                            </p:txEl>
+                                          </p:spTgt>
+                                        </p:tgtEl>
+                                        <p:attrNameLst>
+                                          <p:attrName>style.visibility</p:attrName>
+                                        </p:attrNameLst>
+                                      </p:cBhvr>
+                                      <p:to>
+                                        <p:strVal val="visible"/>
+                                      </p:to>
+                                    </p:set>
+                                  </p:childTnLst>
+                                </p:cTn>
+                              </p:par>
+                            </p:childTnLst>
+                          </p:cTn>
+                        </p:par>
+                      </p:childTnLst>
+                    </p:cTn>
+                  </p:par>
+                </p:childTnLst>
+              </p:cTn>
+              <p:prevCondLst>
+                <p:cond evt="onPrev" delay="0">
+                  <p:tgtEl>
+                    <p:sldTgt/>
+                  </p:tgtEl>
+                </p:cond>
+              </p:prevCondLst>
+              <p:nextCondLst>
+                <p:cond evt="onNext" delay="0">
+                  <p:tgtEl>
+                    <p:sldTgt/>
+                  </p:tgtEl>
+                </p:cond>
+              </p:nextCondLst>
+            </p:seq>
+          </p:childTnLst>
+        </p:cTn>
+      </p:par>
+    </p:tnLst>
+    <p:bldLst>
+      <p:bldP spid="3" grpId="0" build="p"/>
+    </p:bldLst>
+  </p:timing>
 </p:sld>
 </file>
 
@@ -5377,52 +5643,30 @@
           <a:chExt cx="0" cy="0"/>
         </a:xfrm>
       </p:grpSpPr>
-      <p:sp>
-        <p:nvSpPr>
-          <p:cNvPr id="2" name="Title 1"/>
-          <p:cNvSpPr>
-            <a:spLocks noGrp="1"/>
-          </p:cNvSpPr>
-          <p:nvPr>
-            <p:ph type="title"/>
-          </p:nvPr>
-        </p:nvSpPr>
-        <p:spPr/>
-        <p:txBody>
-          <a:bodyPr/>
-          <a:lstStyle/>
-          <a:p>
-            <a:r>
-              <a:rPr lang="en-US" dirty="0"/>
-              <a:t>Example names</a:t>
-            </a:r>
-          </a:p>
-        </p:txBody>
-      </p:sp>
       <p:pic>
         <p:nvPicPr>
-          <p:cNvPr id="4" name="Picture 3"/>
+          <p:cNvPr id="5" name="Picture 4" descr="A screenshot of a computer program&#10;&#10;AI-generated content may be incorrect.">
+            <a:extLst>
+              <a:ext uri="{FF2B5EF4-FFF2-40B4-BE49-F238E27FC236}">
+                <a16:creationId xmlns:a16="http://schemas.microsoft.com/office/drawing/2014/main" id="{3015AE37-CAD4-3DA2-C1B3-755010682C45}"/>
+              </a:ext>
+            </a:extLst>
+          </p:cNvPr>
           <p:cNvPicPr>
             <a:picLocks noChangeAspect="1"/>
           </p:cNvPicPr>
           <p:nvPr/>
         </p:nvPicPr>
         <p:blipFill>
-          <a:blip r:embed="rId2">
-            <a:extLst>
-              <a:ext uri="{28A0092B-C50C-407E-A947-70E740481C1C}">
-                <a14:useLocalDpi xmlns:a14="http://schemas.microsoft.com/office/drawing/2010/main" val="0"/>
-              </a:ext>
-            </a:extLst>
-          </a:blip>
+          <a:blip r:embed="rId2"/>
           <a:stretch>
             <a:fillRect/>
           </a:stretch>
         </p:blipFill>
         <p:spPr>
           <a:xfrm>
-            <a:off x="628650" y="1588304"/>
-            <a:ext cx="7187609" cy="2523608"/>
+            <a:off x="437413" y="711570"/>
+            <a:ext cx="8075966" cy="3414160"/>
           </a:xfrm>
           <a:prstGeom prst="rect">
             <a:avLst/>
@@ -5432,7 +5676,7 @@
     </p:spTree>
     <p:extLst>
       <p:ext uri="{BB962C8B-B14F-4D97-AF65-F5344CB8AC3E}">
-        <p14:creationId xmlns:p14="http://schemas.microsoft.com/office/powerpoint/2010/main" val="1907897959"/>
+        <p14:creationId xmlns:p14="http://schemas.microsoft.com/office/powerpoint/2010/main" val="1047685436"/>
       </p:ext>
     </p:extLst>
   </p:cSld>
